--- a/발표 자료/집에서 쉽게 레모네이드 만들기 게임공학과 2022180021 양현빈 2차발표.pptx
+++ b/발표 자료/집에서 쉽게 레모네이드 만들기 게임공학과 2022180021 양현빈 2차발표.pptx
@@ -2,15 +2,15 @@
 <file path=ppt/presentation.xml><?xml version="1.0" encoding="utf-8"?>
 <p:presentation xmlns:r="http://schemas.openxmlformats.org/officeDocument/2006/relationships" xmlns:c="http://schemas.openxmlformats.org/drawingml/2006/chart" xmlns:a="http://schemas.openxmlformats.org/drawingml/2006/main" xmlns:dgm="http://schemas.openxmlformats.org/drawingml/2006/diagram" xmlns:dsp="http://schemas.microsoft.com/office/drawing/2008/diagram" xmlns:p="http://schemas.openxmlformats.org/presentationml/2006/main">
   <p:sldMasterIdLst>
-    <p:sldMasterId id="2147483648" r:id="rId1"/>
+    <p:sldMasterId id="2147483668" r:id="rId1"/>
   </p:sldMasterIdLst>
   <p:notesMasterIdLst>
     <p:notesMasterId r:id="rId2"/>
   </p:notesMasterIdLst>
   <p:sldIdLst>
     <p:sldId id="256" r:id="rId3"/>
-    <p:sldId id="263" r:id="rId4"/>
-    <p:sldId id="262" r:id="rId5"/>
+    <p:sldId id="257" r:id="rId4"/>
+    <p:sldId id="258" r:id="rId5"/>
   </p:sldIdLst>
   <p:sldSz cx="18288000" cy="10287000"/>
   <p:notesSz cx="6858000" cy="9144000"/>
@@ -164,6 +164,10 @@
             <a:pPr lvl="0">
               <a:defRPr/>
             </a:pPr>
+            <a:r>
+              <a:rPr lang="ko-KR" altLang="en-US"/>
+              <a:t/>
+            </a:r>
             <a:endParaRPr lang="ko-KR" altLang="en-US"/>
           </a:p>
         </p:txBody>
@@ -351,6 +355,10 @@
             <a:pPr lvl="0">
               <a:defRPr/>
             </a:pPr>
+            <a:r>
+              <a:rPr lang="ko-KR" altLang="en-US"/>
+              <a:t/>
+            </a:r>
             <a:endParaRPr lang="ko-KR" altLang="en-US"/>
           </a:p>
         </p:txBody>
@@ -397,11 +405,6 @@
         </p:txBody>
       </p:sp>
     </p:spTree>
-    <p:extLst>
-      <p:ext uri="{BB962C8B-B14F-4D97-AF65-F5344CB8AC3E}">
-        <p14:creationId xmlns:p14="http://schemas.microsoft.com/office/powerpoint/2010/main" val="3303914480"/>
-      </p:ext>
-    </p:extLst>
   </p:cSld>
   <p:clrMap bg1="lt1" tx1="dk1" bg2="lt2" tx2="dk2" accent1="accent1" accent2="accent2" accent3="accent3" accent4="accent4" accent5="accent5" accent6="accent6" hlink="hlink" folHlink="folHlink"/>
   <p:hf hdr="0" ftr="0" dt="0"/>
@@ -3697,175 +3700,28 @@
           <p:nvPr/>
         </p:nvGraphicFramePr>
         <p:xfrm>
-          <a:off x="381000" y="1379233"/>
-          <a:ext cx="17604104" cy="8846820"/>
+          <a:off x="381000" y="1333500"/>
+          <a:ext cx="17604104" cy="8884921"/>
         </p:xfrm>
         <a:graphic>
           <a:graphicData uri="http://schemas.openxmlformats.org/drawingml/2006/table">
             <a:tbl>
-              <a:tblPr firstRow="1" bandRow="1">
-                <a:tableStyle styleId="{729D6073-5DEC-478E-BFBB-120F47F47B7E}" styleName="Light Style 1 - Body/Background 1">
-                  <a:wholeTbl>
-                    <a:tcTxStyle>
-                      <a:fontRef idx="minor">
-                        <a:scrgbClr r="0" g="0" b="0"/>
-                      </a:fontRef>
-                      <a:schemeClr val="tx1"/>
-                    </a:tcTxStyle>
-                    <a:tcStyle>
-                      <a:tcBdr>
-                        <a:left>
-                          <a:ln>
-                            <a:noFill/>
-                          </a:ln>
-                        </a:left>
-                        <a:right>
-                          <a:ln>
-                            <a:noFill/>
-                          </a:ln>
-                        </a:right>
-                        <a:top>
-                          <a:ln w="22700" cmpd="sng">
-                            <a:solidFill>
-                              <a:schemeClr val="dk1"/>
-                            </a:solidFill>
-                          </a:ln>
-                        </a:top>
-                        <a:bottom>
-                          <a:ln w="22700" cmpd="sng">
-                            <a:solidFill>
-                              <a:schemeClr val="dk1"/>
-                            </a:solidFill>
-                          </a:ln>
-                        </a:bottom>
-                        <a:insideH>
-                          <a:ln>
-                            <a:noFill/>
-                          </a:ln>
-                        </a:insideH>
-                        <a:insideV>
-                          <a:ln>
-                            <a:noFill/>
-                          </a:ln>
-                        </a:insideV>
-                      </a:tcBdr>
-                      <a:fill>
-                        <a:noFill/>
-                      </a:fill>
-                    </a:tcStyle>
-                  </a:wholeTbl>
-                  <a:band1H>
-                    <a:tcTxStyle/>
-                    <a:tcStyle>
-                      <a:tcBdr>
-                        <a:top>
-                          <a:ln w="10000" cmpd="sng">
-                            <a:solidFill>
-                              <a:schemeClr val="dk1"/>
-                            </a:solidFill>
-                          </a:ln>
-                        </a:top>
-                        <a:bottom>
-                          <a:ln w="10000" cmpd="sng">
-                            <a:solidFill>
-                              <a:schemeClr val="dk1"/>
-                            </a:solidFill>
-                          </a:ln>
-                        </a:bottom>
-                      </a:tcBdr>
-                      <a:fill>
-                        <a:solidFill>
-                          <a:schemeClr val="dk1">
-                            <a:alpha val="20000"/>
-                            <a:tint val="80000"/>
-                          </a:schemeClr>
-                        </a:solidFill>
-                      </a:fill>
-                    </a:tcStyle>
-                  </a:band1H>
-                  <a:band2H>
-                    <a:tcTxStyle/>
-                    <a:tcStyle>
-                      <a:tcBdr/>
-                    </a:tcStyle>
-                  </a:band2H>
-                  <a:band1V>
-                    <a:tcTxStyle/>
-                    <a:tcStyle>
-                      <a:tcBdr/>
-                      <a:fill>
-                        <a:solidFill>
-                          <a:schemeClr val="dk1">
-                            <a:alpha val="20000"/>
-                          </a:schemeClr>
-                        </a:solidFill>
-                      </a:fill>
-                    </a:tcStyle>
-                  </a:band1V>
-                  <a:lastCol>
-                    <a:tcTxStyle b="on"/>
-                    <a:tcStyle>
-                      <a:tcBdr/>
-                    </a:tcStyle>
-                  </a:lastCol>
-                  <a:firstCol>
-                    <a:tcTxStyle b="on"/>
-                    <a:tcStyle>
-                      <a:tcBdr/>
-                    </a:tcStyle>
-                  </a:firstCol>
-                  <a:lastRow>
-                    <a:tcTxStyle b="on"/>
-                    <a:tcStyle>
-                      <a:tcBdr>
-                        <a:top>
-                          <a:ln w="12700" cmpd="dbl">
-                            <a:solidFill>
-                              <a:schemeClr val="dk1"/>
-                            </a:solidFill>
-                          </a:ln>
-                        </a:top>
-                      </a:tcBdr>
-                      <a:fill>
-                        <a:noFill/>
-                      </a:fill>
-                    </a:tcStyle>
-                  </a:lastRow>
-                  <a:firstRow>
-                    <a:tcTxStyle b="on"/>
-                    <a:tcStyle>
-                      <a:tcBdr>
-                        <a:bottom>
-                          <a:ln w="22700" cmpd="sng">
-                            <a:solidFill>
-                              <a:schemeClr val="dk1"/>
-                            </a:solidFill>
-                          </a:ln>
-                        </a:bottom>
-                      </a:tcBdr>
-                      <a:fill>
-                        <a:noFill/>
-                      </a:fill>
-                    </a:tcStyle>
-                  </a:firstRow>
-                </a:tableStyle>
-              </a:tblPr>
+              <a:tblPr firstRow="1" bandRow="1"/>
               <a:tblGrid>
                 <a:gridCol w="2286000"/>
-                <a:gridCol w="11736705"/>
+                <a:gridCol w="11736704"/>
                 <a:gridCol w="3581400"/>
               </a:tblGrid>
               <a:tr h="429008">
                 <a:tc rowSpan="2">
                   <a:txBody>
                     <a:bodyPr vert="horz" lIns="91440" tIns="45720" rIns="91440" bIns="45720" anchor="t" anchorCtr="0"/>
-                    <a:lstStyle/>
                     <a:p>
                       <a:pPr lvl="0" algn="ctr" latinLnBrk="1">
                         <a:defRPr/>
                       </a:pPr>
                       <a:r>
-                        <a:rPr lang="en-US" altLang="ko-KR" sz="2600" b="1">
+                        <a:rPr lang="en-US" altLang="ko-KR" sz="2500" b="1">
                           <a:solidFill>
                             <a:schemeClr val="bg1"/>
                           </a:solidFill>
@@ -3875,7 +3731,7 @@
                         <a:t>1</a:t>
                       </a:r>
                       <a:r>
-                        <a:rPr lang="ko-KR" altLang="en-US" sz="2600" b="1">
+                        <a:rPr lang="ko-KR" altLang="en-US" sz="2500" b="1">
                           <a:solidFill>
                             <a:schemeClr val="bg1"/>
                           </a:solidFill>
@@ -3884,7 +3740,7 @@
                         </a:rPr>
                         <a:t>주차</a:t>
                       </a:r>
-                      <a:endParaRPr lang="ko-KR" altLang="en-US" sz="2600" b="1">
+                      <a:endParaRPr lang="ko-KR" altLang="en-US" sz="2500" b="1">
                         <a:solidFill>
                           <a:schemeClr val="bg1"/>
                         </a:solidFill>
@@ -3898,13 +3754,12 @@
                 <a:tc>
                   <a:txBody>
                     <a:bodyPr vert="horz" lIns="91440" tIns="45720" rIns="91440" bIns="45720" anchor="t" anchorCtr="0"/>
-                    <a:lstStyle/>
                     <a:p>
                       <a:pPr lvl="0" algn="ctr" latinLnBrk="1">
                         <a:defRPr/>
                       </a:pPr>
                       <a:r>
-                        <a:rPr lang="ko-KR" altLang="en-US" sz="2600" b="1">
+                        <a:rPr lang="ko-KR" altLang="en-US" sz="2500" b="1">
                           <a:solidFill>
                             <a:schemeClr val="bg1"/>
                           </a:solidFill>
@@ -3913,7 +3768,7 @@
                         </a:rPr>
                         <a:t>게임에 필요한 리소스 수집</a:t>
                       </a:r>
-                      <a:endParaRPr lang="ko-KR" altLang="en-US" sz="2600" b="1">
+                      <a:endParaRPr lang="ko-KR" altLang="en-US" sz="2500" b="1">
                         <a:solidFill>
                           <a:schemeClr val="bg1"/>
                         </a:solidFill>
@@ -3927,12 +3782,11 @@
                 <a:tc rowSpan="2">
                   <a:txBody>
                     <a:bodyPr vert="horz" lIns="91440" tIns="45720" rIns="91440" bIns="45720" anchor="t" anchorCtr="0"/>
-                    <a:lstStyle/>
                     <a:p>
                       <a:pPr lvl="0" algn="ctr" latinLnBrk="1">
                         <a:defRPr/>
                       </a:pPr>
-                      <a:endParaRPr lang="en-US" altLang="ko-KR" sz="2600" b="1">
+                      <a:endParaRPr lang="en-US" altLang="ko-KR" sz="2500" b="1">
                         <a:solidFill>
                           <a:schemeClr val="bg1"/>
                         </a:solidFill>
@@ -3945,7 +3799,7 @@
                         <a:defRPr/>
                       </a:pPr>
                       <a:r>
-                        <a:rPr lang="en-US" altLang="ko-KR" sz="2600" b="1">
+                        <a:rPr lang="en-US" altLang="ko-KR" sz="2500" b="1">
                           <a:solidFill>
                             <a:schemeClr val="bg1"/>
                           </a:solidFill>
@@ -3954,7 +3808,7 @@
                         </a:rPr>
                         <a:t>80%</a:t>
                       </a:r>
-                      <a:endParaRPr lang="en-US" altLang="ko-KR" sz="2600" b="1">
+                      <a:endParaRPr lang="en-US" altLang="ko-KR" sz="2500" b="1">
                         <a:solidFill>
                           <a:schemeClr val="bg1"/>
                         </a:solidFill>
@@ -3984,13 +3838,12 @@
                 <a:tc>
                   <a:txBody>
                     <a:bodyPr vert="horz" lIns="91440" tIns="45720" rIns="91440" bIns="45720" anchor="t" anchorCtr="0"/>
-                    <a:lstStyle/>
                     <a:p>
                       <a:pPr lvl="0" algn="ctr" latinLnBrk="1">
                         <a:defRPr/>
                       </a:pPr>
                       <a:r>
-                        <a:rPr lang="en-US" altLang="ko-KR" sz="2600" b="1">
+                        <a:rPr lang="en-US" altLang="ko-KR" sz="2500" b="1">
                           <a:solidFill>
                             <a:schemeClr val="bg1"/>
                           </a:solidFill>
@@ -4000,7 +3853,7 @@
                         <a:t>ui</a:t>
                       </a:r>
                       <a:r>
-                        <a:rPr lang="ko-KR" altLang="en-US" sz="2600" b="1">
+                        <a:rPr lang="ko-KR" altLang="en-US" sz="2500" b="1">
                           <a:solidFill>
                             <a:schemeClr val="bg1"/>
                           </a:solidFill>
@@ -4009,7 +3862,7 @@
                         </a:rPr>
                         <a:t>를 제외한 리소스는 거의 다 찾음</a:t>
                       </a:r>
-                      <a:endParaRPr lang="ko-KR" altLang="en-US" sz="2600" b="1">
+                      <a:endParaRPr lang="ko-KR" altLang="en-US" sz="2500" b="1">
                         <a:solidFill>
                           <a:schemeClr val="bg1"/>
                         </a:solidFill>
@@ -4039,13 +3892,12 @@
                 <a:tc rowSpan="2">
                   <a:txBody>
                     <a:bodyPr vert="horz" lIns="91440" tIns="45720" rIns="91440" bIns="45720" anchor="t" anchorCtr="0"/>
-                    <a:lstStyle/>
                     <a:p>
                       <a:pPr lvl="0" algn="ctr" latinLnBrk="1">
                         <a:defRPr/>
                       </a:pPr>
                       <a:r>
-                        <a:rPr lang="en-US" altLang="ko-KR" sz="2600" b="1">
+                        <a:rPr lang="en-US" altLang="ko-KR" sz="2500" b="1">
                           <a:solidFill>
                             <a:schemeClr val="bg1"/>
                           </a:solidFill>
@@ -4055,7 +3907,7 @@
                         <a:t>2</a:t>
                       </a:r>
                       <a:r>
-                        <a:rPr lang="ko-KR" altLang="en-US" sz="2600" b="1">
+                        <a:rPr lang="ko-KR" altLang="en-US" sz="2500" b="1">
                           <a:solidFill>
                             <a:schemeClr val="bg1"/>
                           </a:solidFill>
@@ -4064,7 +3916,7 @@
                         </a:rPr>
                         <a:t>주차</a:t>
                       </a:r>
-                      <a:endParaRPr lang="ko-KR" altLang="en-US" sz="2600" b="1">
+                      <a:endParaRPr lang="ko-KR" altLang="en-US" sz="2500" b="1">
                         <a:solidFill>
                           <a:schemeClr val="bg1"/>
                         </a:solidFill>
@@ -4078,13 +3930,12 @@
                 <a:tc>
                   <a:txBody>
                     <a:bodyPr vert="horz" lIns="91440" tIns="45720" rIns="91440" bIns="45720" anchor="t" anchorCtr="0"/>
-                    <a:lstStyle/>
                     <a:p>
                       <a:pPr lvl="0" algn="ctr" latinLnBrk="1">
                         <a:defRPr/>
                       </a:pPr>
                       <a:r>
-                        <a:rPr lang="ko-KR" altLang="en-US" sz="2600" b="1">
+                        <a:rPr lang="ko-KR" altLang="en-US" sz="2500" b="1">
                           <a:solidFill>
                             <a:schemeClr val="bg1"/>
                           </a:solidFill>
@@ -4093,7 +3944,7 @@
                         </a:rPr>
                         <a:t>게임 프레임 워크 그리고 리소스가 제대로 작동하는 지 확인</a:t>
                       </a:r>
-                      <a:endParaRPr lang="ko-KR" altLang="en-US" sz="2600" b="1">
+                      <a:endParaRPr lang="ko-KR" altLang="en-US" sz="2500" b="1">
                         <a:solidFill>
                           <a:schemeClr val="bg1"/>
                         </a:solidFill>
@@ -4107,12 +3958,11 @@
                 <a:tc rowSpan="2">
                   <a:txBody>
                     <a:bodyPr vert="horz" lIns="91440" tIns="45720" rIns="91440" bIns="45720" anchor="t" anchorCtr="0"/>
-                    <a:lstStyle/>
                     <a:p>
                       <a:pPr lvl="0" algn="ctr" latinLnBrk="1">
                         <a:defRPr/>
                       </a:pPr>
-                      <a:endParaRPr lang="ko-KR" altLang="en-US" sz="2600" b="1">
+                      <a:endParaRPr lang="ko-KR" altLang="en-US" sz="2500" b="1">
                         <a:solidFill>
                           <a:schemeClr val="bg1"/>
                         </a:solidFill>
@@ -4125,7 +3975,7 @@
                         <a:defRPr/>
                       </a:pPr>
                       <a:r>
-                        <a:rPr lang="en-US" altLang="ko-KR" sz="2600" b="1">
+                        <a:rPr lang="en-US" altLang="ko-KR" sz="2500" b="1">
                           <a:solidFill>
                             <a:schemeClr val="bg1"/>
                           </a:solidFill>
@@ -4134,7 +3984,7 @@
                         </a:rPr>
                         <a:t>80%</a:t>
                       </a:r>
-                      <a:endParaRPr lang="ko-KR" altLang="en-US" sz="2600" b="1">
+                      <a:endParaRPr lang="ko-KR" altLang="en-US" sz="2500" b="1">
                         <a:solidFill>
                           <a:schemeClr val="bg1"/>
                         </a:solidFill>
@@ -4164,13 +4014,12 @@
                 <a:tc>
                   <a:txBody>
                     <a:bodyPr vert="horz" lIns="91440" tIns="45720" rIns="91440" bIns="45720" anchor="t" anchorCtr="0"/>
-                    <a:lstStyle/>
                     <a:p>
                       <a:pPr lvl="0" algn="ctr" latinLnBrk="1">
                         <a:defRPr/>
                       </a:pPr>
                       <a:r>
-                        <a:rPr lang="ko-KR" altLang="en-US" sz="2600" b="1">
+                        <a:rPr lang="ko-KR" altLang="en-US" sz="2500" b="1">
                           <a:solidFill>
                             <a:schemeClr val="bg1"/>
                           </a:solidFill>
@@ -4179,7 +4028,7 @@
                         </a:rPr>
                         <a:t>게임 프레임 워크와 있는 리소스들이 작동되는지 확인을 다 함</a:t>
                       </a:r>
-                      <a:endParaRPr lang="ko-KR" altLang="en-US" sz="2600" b="1">
+                      <a:endParaRPr lang="ko-KR" altLang="en-US" sz="2500" b="1">
                         <a:solidFill>
                           <a:schemeClr val="bg1"/>
                         </a:solidFill>
@@ -4209,13 +4058,12 @@
                 <a:tc rowSpan="2">
                   <a:txBody>
                     <a:bodyPr vert="horz" lIns="91440" tIns="45720" rIns="91440" bIns="45720" anchor="t" anchorCtr="0"/>
-                    <a:lstStyle/>
                     <a:p>
                       <a:pPr lvl="0" algn="ctr" latinLnBrk="1">
                         <a:defRPr/>
                       </a:pPr>
                       <a:r>
-                        <a:rPr lang="en-US" altLang="ko-KR" sz="2600" b="1">
+                        <a:rPr lang="en-US" altLang="ko-KR" sz="2500" b="1">
                           <a:solidFill>
                             <a:schemeClr val="bg1"/>
                           </a:solidFill>
@@ -4225,7 +4073,7 @@
                         <a:t>3</a:t>
                       </a:r>
                       <a:r>
-                        <a:rPr lang="ko-KR" altLang="en-US" sz="2600" b="1">
+                        <a:rPr lang="ko-KR" altLang="en-US" sz="2500" b="1">
                           <a:solidFill>
                             <a:schemeClr val="bg1"/>
                           </a:solidFill>
@@ -4234,7 +4082,7 @@
                         </a:rPr>
                         <a:t>주차</a:t>
                       </a:r>
-                      <a:endParaRPr lang="ko-KR" altLang="en-US" sz="2600" b="1">
+                      <a:endParaRPr lang="ko-KR" altLang="en-US" sz="2500" b="1">
                         <a:solidFill>
                           <a:schemeClr val="bg1"/>
                         </a:solidFill>
@@ -4248,13 +4096,12 @@
                 <a:tc>
                   <a:txBody>
                     <a:bodyPr vert="horz" lIns="91440" tIns="45720" rIns="91440" bIns="45720" anchor="t" anchorCtr="0"/>
-                    <a:lstStyle/>
                     <a:p>
                       <a:pPr lvl="0" algn="ctr" latinLnBrk="1">
                         <a:defRPr/>
                       </a:pPr>
                       <a:r>
-                        <a:rPr lang="ko-KR" altLang="en-US" sz="2600" b="1">
+                        <a:rPr lang="ko-KR" altLang="en-US" sz="2500" b="1">
                           <a:solidFill>
                             <a:schemeClr val="bg1"/>
                           </a:solidFill>
@@ -4263,7 +4110,7 @@
                         </a:rPr>
                         <a:t>본격적인 코드 짜기</a:t>
                       </a:r>
-                      <a:endParaRPr lang="ko-KR" altLang="en-US" sz="2600" b="1">
+                      <a:endParaRPr lang="ko-KR" altLang="en-US" sz="2500" b="1">
                         <a:solidFill>
                           <a:schemeClr val="bg1"/>
                         </a:solidFill>
@@ -4277,12 +4124,33 @@
                 <a:tc rowSpan="2">
                   <a:txBody>
                     <a:bodyPr vert="horz" lIns="91440" tIns="45720" rIns="91440" bIns="45720" anchor="t" anchorCtr="0"/>
-                    <a:lstStyle/>
                     <a:p>
                       <a:pPr lvl="0" algn="ctr" latinLnBrk="1">
                         <a:defRPr/>
                       </a:pPr>
-                      <a:endParaRPr lang="ko-KR" altLang="en-US" sz="2600" b="1">
+                      <a:endParaRPr lang="ko-KR" altLang="en-US" sz="2500" b="1">
+                        <a:solidFill>
+                          <a:schemeClr val="bg1"/>
+                        </a:solidFill>
+                        <a:latin typeface="맑은 고딕"/>
+                        <a:cs typeface="둥근모꼴"/>
+                      </a:endParaRPr>
+                    </a:p>
+                    <a:p>
+                      <a:pPr lvl="0" algn="ctr" latinLnBrk="1">
+                        <a:defRPr/>
+                      </a:pPr>
+                      <a:r>
+                        <a:rPr lang="en-US" altLang="ko-KR" sz="2500" b="1">
+                          <a:solidFill>
+                            <a:schemeClr val="bg1"/>
+                          </a:solidFill>
+                          <a:latin typeface="맑은 고딕"/>
+                          <a:cs typeface="둥근모꼴"/>
+                        </a:rPr>
+                        <a:t>100%</a:t>
+                      </a:r>
+                      <a:endParaRPr lang="en-US" altLang="ko-KR" sz="2500" b="1">
                         <a:solidFill>
                           <a:schemeClr val="bg1"/>
                         </a:solidFill>
@@ -4312,12 +4180,61 @@
                 <a:tc>
                   <a:txBody>
                     <a:bodyPr vert="horz" lIns="91440" tIns="45720" rIns="91440" bIns="45720" anchor="t" anchorCtr="0"/>
-                    <a:lstStyle/>
                     <a:p>
                       <a:pPr lvl="0" algn="ctr" latinLnBrk="1">
                         <a:defRPr/>
                       </a:pPr>
-                      <a:endParaRPr lang="ko-KR" altLang="en-US" sz="2600" b="1">
+                      <a:r>
+                        <a:rPr lang="en-US" altLang="ko-KR" sz="2500" b="1">
+                          <a:solidFill>
+                            <a:schemeClr val="bg1"/>
+                          </a:solidFill>
+                          <a:latin typeface="맑은 고딕"/>
+                          <a:cs typeface="둥근모꼴"/>
+                        </a:rPr>
+                        <a:t>+</a:t>
+                      </a:r>
+                      <a:r>
+                        <a:rPr lang="ko-KR" altLang="en-US" sz="2500" b="1">
+                          <a:solidFill>
+                            <a:schemeClr val="bg1"/>
+                          </a:solidFill>
+                          <a:latin typeface="맑은 고딕"/>
+                          <a:cs typeface="둥근모꼴"/>
+                        </a:rPr>
+                        <a:t>그림이 무슨 그림인지 알아내는 알고리즘 개발</a:t>
+                      </a:r>
+                      <a:r>
+                        <a:rPr lang="en-US" altLang="ko-KR" sz="2500" b="1">
+                          <a:solidFill>
+                            <a:schemeClr val="bg1"/>
+                          </a:solidFill>
+                          <a:latin typeface="맑은 고딕"/>
+                          <a:cs typeface="둥근모꼴"/>
+                        </a:rPr>
+                        <a:t>(</a:t>
+                      </a:r>
+                      <a:r>
+                        <a:rPr lang="ko-KR" altLang="en-US" sz="2500" b="1">
+                          <a:solidFill>
+                            <a:schemeClr val="bg1"/>
+                          </a:solidFill>
+                          <a:latin typeface="맑은 고딕"/>
+                          <a:cs typeface="둥근모꼴"/>
+                        </a:rPr>
+                        <a:t>이게 적용이 먼저 되야 스테이지 만들기가 가능하기 때문</a:t>
+                      </a:r>
+                      <a:r>
+                        <a:rPr lang="en-US" altLang="ko-KR" sz="2500" b="1">
+                          <a:solidFill>
+                            <a:schemeClr val="bg1"/>
+                          </a:solidFill>
+                          <a:latin typeface="맑은 고딕"/>
+                          <a:cs typeface="둥근모꼴"/>
+                        </a:rPr>
+                        <a:t>)</a:t>
+                      </a:r>
+                      <a:endParaRPr lang="en-US" altLang="ko-KR" sz="2500" b="1">
                         <a:solidFill>
                           <a:schemeClr val="bg1"/>
                         </a:solidFill>
@@ -4347,13 +4264,12 @@
                 <a:tc rowSpan="2">
                   <a:txBody>
                     <a:bodyPr vert="horz" lIns="91440" tIns="45720" rIns="91440" bIns="45720" anchor="t" anchorCtr="0"/>
-                    <a:lstStyle/>
                     <a:p>
                       <a:pPr lvl="0" algn="ctr" latinLnBrk="1">
                         <a:defRPr/>
                       </a:pPr>
                       <a:r>
-                        <a:rPr lang="en-US" altLang="ko-KR" sz="2600" b="1">
+                        <a:rPr lang="en-US" altLang="ko-KR" sz="2500" b="1">
                           <a:solidFill>
                             <a:schemeClr val="bg1"/>
                           </a:solidFill>
@@ -4363,7 +4279,7 @@
                         <a:t>4</a:t>
                       </a:r>
                       <a:r>
-                        <a:rPr lang="ko-KR" altLang="en-US" sz="2600" b="1">
+                        <a:rPr lang="ko-KR" altLang="en-US" sz="2500" b="1">
                           <a:solidFill>
                             <a:schemeClr val="bg1"/>
                           </a:solidFill>
@@ -4372,7 +4288,7 @@
                         </a:rPr>
                         <a:t>주차</a:t>
                       </a:r>
-                      <a:endParaRPr lang="ko-KR" altLang="en-US" sz="2600" b="1">
+                      <a:endParaRPr lang="ko-KR" altLang="en-US" sz="2500" b="1">
                         <a:solidFill>
                           <a:schemeClr val="bg1"/>
                         </a:solidFill>
@@ -4386,13 +4302,12 @@
                 <a:tc>
                   <a:txBody>
                     <a:bodyPr vert="horz" lIns="91440" tIns="45720" rIns="91440" bIns="45720" anchor="t" anchorCtr="0"/>
-                    <a:lstStyle/>
                     <a:p>
                       <a:pPr lvl="0" algn="ctr" latinLnBrk="1">
                         <a:defRPr/>
                       </a:pPr>
                       <a:r>
-                        <a:rPr lang="ko-KR" altLang="en-US" sz="2600" b="1">
+                        <a:rPr lang="ko-KR" altLang="en-US" sz="2500" b="1">
                           <a:solidFill>
                             <a:schemeClr val="bg1"/>
                           </a:solidFill>
@@ -4401,7 +4316,7 @@
                         </a:rPr>
                         <a:t>배경과 맵을 구현 그리고 캐릭터 스프라이트 적용</a:t>
                       </a:r>
-                      <a:endParaRPr lang="ko-KR" altLang="en-US" sz="2600" b="1">
+                      <a:endParaRPr lang="ko-KR" altLang="en-US" sz="2500" b="1">
                         <a:solidFill>
                           <a:schemeClr val="bg1"/>
                         </a:solidFill>
@@ -4415,12 +4330,33 @@
                 <a:tc rowSpan="2">
                   <a:txBody>
                     <a:bodyPr vert="horz" lIns="91440" tIns="45720" rIns="91440" bIns="45720" anchor="t" anchorCtr="0"/>
-                    <a:lstStyle/>
                     <a:p>
                       <a:pPr lvl="0" algn="ctr" latinLnBrk="1">
                         <a:defRPr/>
                       </a:pPr>
-                      <a:endParaRPr lang="ko-KR" altLang="en-US" sz="2600" b="1">
+                      <a:endParaRPr lang="en-US" altLang="ko-KR" sz="2500" b="1">
+                        <a:solidFill>
+                          <a:schemeClr val="bg1"/>
+                        </a:solidFill>
+                        <a:latin typeface="맑은 고딕"/>
+                        <a:cs typeface="둥근모꼴"/>
+                      </a:endParaRPr>
+                    </a:p>
+                    <a:p>
+                      <a:pPr lvl="0" algn="ctr" latinLnBrk="1">
+                        <a:defRPr/>
+                      </a:pPr>
+                      <a:r>
+                        <a:rPr lang="en-US" altLang="ko-KR" sz="2500" b="1">
+                          <a:solidFill>
+                            <a:schemeClr val="bg1"/>
+                          </a:solidFill>
+                          <a:latin typeface="맑은 고딕"/>
+                          <a:cs typeface="둥근모꼴"/>
+                        </a:rPr>
+                        <a:t>90%</a:t>
+                      </a:r>
+                      <a:endParaRPr lang="en-US" altLang="ko-KR" sz="2500" b="1">
                         <a:solidFill>
                           <a:schemeClr val="bg1"/>
                         </a:solidFill>
@@ -4450,12 +4386,81 @@
                 <a:tc>
                   <a:txBody>
                     <a:bodyPr vert="horz" lIns="91440" tIns="45720" rIns="91440" bIns="45720" anchor="t" anchorCtr="0"/>
-                    <a:lstStyle/>
                     <a:p>
                       <a:pPr lvl="0" algn="ctr" latinLnBrk="1">
                         <a:defRPr/>
                       </a:pPr>
-                      <a:endParaRPr lang="ko-KR" altLang="en-US" sz="2600" b="1">
+                      <a:r>
+                        <a:rPr lang="en-US" altLang="ko-KR" sz="2500" b="1">
+                          <a:solidFill>
+                            <a:schemeClr val="bg1"/>
+                          </a:solidFill>
+                          <a:latin typeface="맑은 고딕"/>
+                          <a:cs typeface="둥근모꼴"/>
+                        </a:rPr>
+                        <a:t>+5</a:t>
+                      </a:r>
+                      <a:r>
+                        <a:rPr lang="ko-KR" altLang="en-US" sz="2500" b="1">
+                          <a:solidFill>
+                            <a:schemeClr val="bg1"/>
+                          </a:solidFill>
+                          <a:latin typeface="맑은 고딕"/>
+                          <a:cs typeface="둥근모꼴"/>
+                        </a:rPr>
+                        <a:t>주차 거의 개발</a:t>
+                      </a:r>
+                      <a:r>
+                        <a:rPr lang="en-US" altLang="ko-KR" sz="2500" b="1">
+                          <a:solidFill>
+                            <a:schemeClr val="bg1"/>
+                          </a:solidFill>
+                          <a:latin typeface="맑은 고딕"/>
+                          <a:cs typeface="둥근모꼴"/>
+                        </a:rPr>
+                        <a:t>(4</a:t>
+                      </a:r>
+                      <a:r>
+                        <a:rPr lang="ko-KR" altLang="en-US" sz="2500" b="1">
+                          <a:solidFill>
+                            <a:schemeClr val="bg1"/>
+                          </a:solidFill>
+                          <a:latin typeface="맑은 고딕"/>
+                          <a:cs typeface="둥근모꼴"/>
+                        </a:rPr>
+                        <a:t>주차 내용을 하면 </a:t>
+                      </a:r>
+                      <a:r>
+                        <a:rPr lang="en-US" altLang="ko-KR" sz="2500" b="1">
+                          <a:solidFill>
+                            <a:schemeClr val="bg1"/>
+                          </a:solidFill>
+                          <a:latin typeface="맑은 고딕"/>
+                          <a:cs typeface="둥근모꼴"/>
+                        </a:rPr>
+                        <a:t>5</a:t>
+                      </a:r>
+                      <a:r>
+                        <a:rPr lang="ko-KR" altLang="en-US" sz="2500" b="1">
+                          <a:solidFill>
+                            <a:schemeClr val="bg1"/>
+                          </a:solidFill>
+                          <a:latin typeface="맑은 고딕"/>
+                          <a:cs typeface="둥근모꼴"/>
+                        </a:rPr>
+                        <a:t>주차 내용 거의 만들기 가능</a:t>
+                      </a:r>
+                      <a:r>
+                        <a:rPr lang="en-US" altLang="ko-KR" sz="2500" b="1">
+                          <a:solidFill>
+                            <a:schemeClr val="bg1"/>
+                          </a:solidFill>
+                          <a:latin typeface="맑은 고딕"/>
+                          <a:cs typeface="둥근모꼴"/>
+                        </a:rPr>
+                        <a:t>)</a:t>
+                      </a:r>
+                      <a:endParaRPr lang="en-US" altLang="ko-KR" sz="2500" b="1">
                         <a:solidFill>
                           <a:schemeClr val="bg1"/>
                         </a:solidFill>
@@ -4485,13 +4490,12 @@
                 <a:tc rowSpan="2">
                   <a:txBody>
                     <a:bodyPr vert="horz" lIns="91440" tIns="45720" rIns="91440" bIns="45720" anchor="t" anchorCtr="0"/>
-                    <a:lstStyle/>
                     <a:p>
                       <a:pPr lvl="0" algn="ctr" latinLnBrk="1">
                         <a:defRPr/>
                       </a:pPr>
                       <a:r>
-                        <a:rPr lang="en-US" altLang="ko-KR" sz="2600" b="1">
+                        <a:rPr lang="en-US" altLang="ko-KR" sz="2500" b="1">
                           <a:solidFill>
                             <a:schemeClr val="bg1"/>
                           </a:solidFill>
@@ -4501,7 +4505,7 @@
                         <a:t>5</a:t>
                       </a:r>
                       <a:r>
-                        <a:rPr lang="ko-KR" altLang="en-US" sz="2600" b="1">
+                        <a:rPr lang="ko-KR" altLang="en-US" sz="2500" b="1">
                           <a:solidFill>
                             <a:schemeClr val="bg1"/>
                           </a:solidFill>
@@ -4510,7 +4514,7 @@
                         </a:rPr>
                         <a:t>주차</a:t>
                       </a:r>
-                      <a:endParaRPr lang="ko-KR" altLang="en-US" sz="2600" b="1">
+                      <a:endParaRPr lang="ko-KR" altLang="en-US" sz="2500" b="1">
                         <a:solidFill>
                           <a:schemeClr val="bg1"/>
                         </a:solidFill>
@@ -4524,13 +4528,12 @@
                 <a:tc>
                   <a:txBody>
                     <a:bodyPr vert="horz" lIns="91440" tIns="45720" rIns="91440" bIns="45720" anchor="t" anchorCtr="0"/>
-                    <a:lstStyle/>
                     <a:p>
                       <a:pPr lvl="0" algn="ctr" latinLnBrk="1">
                         <a:defRPr/>
                       </a:pPr>
                       <a:r>
-                        <a:rPr lang="ko-KR" altLang="en-US" sz="2600" b="1">
+                        <a:rPr lang="ko-KR" altLang="en-US" sz="2500" b="1">
                           <a:solidFill>
                             <a:schemeClr val="bg1"/>
                           </a:solidFill>
@@ -4540,7 +4543,7 @@
                         <a:t>캐릭터의 조작 개발</a:t>
                       </a:r>
                       <a:r>
-                        <a:rPr lang="en-US" altLang="ko-KR" sz="2600" b="1">
+                        <a:rPr lang="en-US" altLang="ko-KR" sz="2500" b="1">
                           <a:solidFill>
                             <a:schemeClr val="bg1"/>
                           </a:solidFill>
@@ -4550,7 +4553,7 @@
                         <a:t>,</a:t>
                       </a:r>
                       <a:r>
-                        <a:rPr lang="ko-KR" altLang="en-US" sz="2600" b="1">
+                        <a:rPr lang="ko-KR" altLang="en-US" sz="2500" b="1">
                           <a:solidFill>
                             <a:schemeClr val="bg1"/>
                           </a:solidFill>
@@ -4560,7 +4563,7 @@
                         <a:t> 스테이지 </a:t>
                       </a:r>
                       <a:r>
-                        <a:rPr lang="en-US" altLang="ko-KR" sz="2600" b="1">
+                        <a:rPr lang="en-US" altLang="ko-KR" sz="2500" b="1">
                           <a:solidFill>
                             <a:schemeClr val="bg1"/>
                           </a:solidFill>
@@ -4570,7 +4573,7 @@
                         <a:t>1</a:t>
                       </a:r>
                       <a:r>
-                        <a:rPr lang="ko-KR" altLang="en-US" sz="2600" b="1">
+                        <a:rPr lang="ko-KR" altLang="en-US" sz="2500" b="1">
                           <a:solidFill>
                             <a:schemeClr val="bg1"/>
                           </a:solidFill>
@@ -4579,7 +4582,7 @@
                         </a:rPr>
                         <a:t> 개발</a:t>
                       </a:r>
-                      <a:endParaRPr lang="ko-KR" altLang="en-US" sz="2600" b="1">
+                      <a:endParaRPr lang="ko-KR" altLang="en-US" sz="2500" b="1">
                         <a:solidFill>
                           <a:schemeClr val="bg1"/>
                         </a:solidFill>
@@ -4593,12 +4596,11 @@
                 <a:tc rowSpan="2">
                   <a:txBody>
                     <a:bodyPr vert="horz" lIns="91440" tIns="45720" rIns="91440" bIns="45720" anchor="t" anchorCtr="0"/>
-                    <a:lstStyle/>
                     <a:p>
                       <a:pPr lvl="0" algn="ctr" latinLnBrk="1">
                         <a:defRPr/>
                       </a:pPr>
-                      <a:endParaRPr lang="ko-KR" altLang="en-US" sz="2600" b="1">
+                      <a:endParaRPr lang="ko-KR" altLang="en-US" sz="2500" b="1">
                         <a:solidFill>
                           <a:schemeClr val="bg1"/>
                         </a:solidFill>
@@ -4628,12 +4630,11 @@
                 <a:tc>
                   <a:txBody>
                     <a:bodyPr vert="horz" lIns="91440" tIns="45720" rIns="91440" bIns="45720" anchor="t" anchorCtr="0"/>
-                    <a:lstStyle/>
                     <a:p>
                       <a:pPr lvl="0" algn="ctr" latinLnBrk="1">
                         <a:defRPr/>
                       </a:pPr>
-                      <a:endParaRPr lang="ko-KR" altLang="en-US" sz="2600" b="1">
+                      <a:endParaRPr lang="ko-KR" altLang="en-US" sz="2500" b="1">
                         <a:solidFill>
                           <a:schemeClr val="bg1"/>
                         </a:solidFill>
@@ -4663,13 +4664,12 @@
                 <a:tc rowSpan="2">
                   <a:txBody>
                     <a:bodyPr vert="horz" lIns="91440" tIns="45720" rIns="91440" bIns="45720" anchor="t" anchorCtr="0"/>
-                    <a:lstStyle/>
                     <a:p>
                       <a:pPr lvl="0" algn="ctr" latinLnBrk="1">
                         <a:defRPr/>
                       </a:pPr>
                       <a:r>
-                        <a:rPr lang="en-US" altLang="ko-KR" sz="2600" b="1">
+                        <a:rPr lang="en-US" altLang="ko-KR" sz="2500" b="1">
                           <a:solidFill>
                             <a:schemeClr val="bg1"/>
                           </a:solidFill>
@@ -4679,7 +4679,7 @@
                         <a:t>6</a:t>
                       </a:r>
                       <a:r>
-                        <a:rPr lang="ko-KR" altLang="en-US" sz="2600" b="1">
+                        <a:rPr lang="ko-KR" altLang="en-US" sz="2500" b="1">
                           <a:solidFill>
                             <a:schemeClr val="bg1"/>
                           </a:solidFill>
@@ -4688,7 +4688,7 @@
                         </a:rPr>
                         <a:t>주차</a:t>
                       </a:r>
-                      <a:endParaRPr lang="ko-KR" altLang="en-US" sz="2600" b="1">
+                      <a:endParaRPr lang="ko-KR" altLang="en-US" sz="2500" b="1">
                         <a:solidFill>
                           <a:schemeClr val="bg1"/>
                         </a:solidFill>
@@ -4702,13 +4702,12 @@
                 <a:tc>
                   <a:txBody>
                     <a:bodyPr vert="horz" lIns="91440" tIns="45720" rIns="91440" bIns="45720" anchor="t" anchorCtr="0"/>
-                    <a:lstStyle/>
                     <a:p>
                       <a:pPr lvl="0" algn="ctr" latinLnBrk="1">
                         <a:defRPr/>
                       </a:pPr>
                       <a:r>
-                        <a:rPr lang="ko-KR" altLang="en-US" sz="2600" b="1">
+                        <a:rPr lang="ko-KR" altLang="en-US" sz="2500" b="1">
                           <a:solidFill>
                             <a:schemeClr val="bg1"/>
                           </a:solidFill>
@@ -4718,7 +4717,7 @@
                         <a:t>그림이 무슨 그림인지 알아내는 알고리즘 개발</a:t>
                       </a:r>
                       <a:r>
-                        <a:rPr lang="en-US" altLang="ko-KR" sz="2600" b="1">
+                        <a:rPr lang="en-US" altLang="ko-KR" sz="2500" b="1">
                           <a:solidFill>
                             <a:schemeClr val="bg1"/>
                           </a:solidFill>
@@ -4728,7 +4727,7 @@
                         <a:t>,</a:t>
                       </a:r>
                       <a:r>
-                        <a:rPr lang="ko-KR" altLang="en-US" sz="2600" b="1">
+                        <a:rPr lang="ko-KR" altLang="en-US" sz="2500" b="1">
                           <a:solidFill>
                             <a:schemeClr val="bg1"/>
                           </a:solidFill>
@@ -4738,7 +4737,7 @@
                         <a:t> 스테이지 </a:t>
                       </a:r>
                       <a:r>
-                        <a:rPr lang="en-US" altLang="ko-KR" sz="2600" b="1">
+                        <a:rPr lang="en-US" altLang="ko-KR" sz="2500" b="1">
                           <a:solidFill>
                             <a:schemeClr val="bg1"/>
                           </a:solidFill>
@@ -4748,7 +4747,7 @@
                         <a:t>2</a:t>
                       </a:r>
                       <a:r>
-                        <a:rPr lang="ko-KR" altLang="en-US" sz="2600" b="1">
+                        <a:rPr lang="ko-KR" altLang="en-US" sz="2500" b="1">
                           <a:solidFill>
                             <a:schemeClr val="bg1"/>
                           </a:solidFill>
@@ -4757,7 +4756,7 @@
                         </a:rPr>
                         <a:t> 개발</a:t>
                       </a:r>
-                      <a:endParaRPr lang="ko-KR" altLang="en-US" sz="2600" b="1">
+                      <a:endParaRPr lang="ko-KR" altLang="en-US" sz="2500" b="1">
                         <a:solidFill>
                           <a:schemeClr val="bg1"/>
                         </a:solidFill>
@@ -4771,12 +4770,11 @@
                 <a:tc rowSpan="2">
                   <a:txBody>
                     <a:bodyPr vert="horz" lIns="91440" tIns="45720" rIns="91440" bIns="45720" anchor="t" anchorCtr="0"/>
-                    <a:lstStyle/>
                     <a:p>
                       <a:pPr lvl="0" algn="ctr" latinLnBrk="1">
                         <a:defRPr/>
                       </a:pPr>
-                      <a:endParaRPr lang="ko-KR" altLang="en-US" sz="2600" b="1">
+                      <a:endParaRPr lang="ko-KR" altLang="en-US" sz="2500" b="1">
                         <a:solidFill>
                           <a:schemeClr val="bg1"/>
                         </a:solidFill>
@@ -4806,12 +4804,61 @@
                 <a:tc>
                   <a:txBody>
                     <a:bodyPr vert="horz" lIns="91440" tIns="45720" rIns="91440" bIns="45720" anchor="t" anchorCtr="0"/>
-                    <a:lstStyle/>
                     <a:p>
                       <a:pPr lvl="0" algn="ctr" latinLnBrk="1">
                         <a:defRPr/>
                       </a:pPr>
-                      <a:endParaRPr lang="ko-KR" altLang="en-US" sz="2600" b="1">
+                      <a:r>
+                        <a:rPr lang="en-US" altLang="ko-KR" sz="2500" b="1">
+                          <a:solidFill>
+                            <a:schemeClr val="bg1"/>
+                          </a:solidFill>
+                          <a:latin typeface="맑은 고딕"/>
+                          <a:cs typeface="둥근모꼴"/>
+                        </a:rPr>
+                        <a:t>-</a:t>
+                      </a:r>
+                      <a:r>
+                        <a:rPr lang="ko-KR" altLang="en-US" sz="2500" b="1">
+                          <a:solidFill>
+                            <a:schemeClr val="bg1"/>
+                          </a:solidFill>
+                          <a:latin typeface="맑은 고딕"/>
+                          <a:cs typeface="둥근모꼴"/>
+                        </a:rPr>
+                        <a:t>그림이 무슨 그림인지 알아내는 알고리즘 개발</a:t>
+                      </a:r>
+                      <a:r>
+                        <a:rPr lang="en-US" altLang="ko-KR" sz="2500" b="1">
+                          <a:solidFill>
+                            <a:schemeClr val="bg1"/>
+                          </a:solidFill>
+                          <a:latin typeface="맑은 고딕"/>
+                          <a:cs typeface="둥근모꼴"/>
+                        </a:rPr>
+                        <a:t>(3</a:t>
+                      </a:r>
+                      <a:r>
+                        <a:rPr lang="ko-KR" altLang="en-US" sz="2500" b="1">
+                          <a:solidFill>
+                            <a:schemeClr val="bg1"/>
+                          </a:solidFill>
+                          <a:latin typeface="맑은 고딕"/>
+                          <a:cs typeface="둥근모꼴"/>
+                        </a:rPr>
+                        <a:t>주차 때 만듬</a:t>
+                      </a:r>
+                      <a:r>
+                        <a:rPr lang="en-US" altLang="ko-KR" sz="2500" b="1">
+                          <a:solidFill>
+                            <a:schemeClr val="bg1"/>
+                          </a:solidFill>
+                          <a:latin typeface="맑은 고딕"/>
+                          <a:cs typeface="둥근모꼴"/>
+                        </a:rPr>
+                        <a:t>)</a:t>
+                      </a:r>
+                      <a:endParaRPr lang="en-US" altLang="ko-KR" sz="2500" b="1">
                         <a:solidFill>
                           <a:schemeClr val="bg1"/>
                         </a:solidFill>
@@ -4841,13 +4888,12 @@
                 <a:tc rowSpan="2">
                   <a:txBody>
                     <a:bodyPr vert="horz" lIns="91440" tIns="45720" rIns="91440" bIns="45720" anchor="t" anchorCtr="0"/>
-                    <a:lstStyle/>
                     <a:p>
                       <a:pPr lvl="0" algn="ctr" latinLnBrk="1">
                         <a:defRPr/>
                       </a:pPr>
                       <a:r>
-                        <a:rPr lang="en-US" altLang="ko-KR" sz="2600" b="1">
+                        <a:rPr lang="en-US" altLang="ko-KR" sz="2500" b="1">
                           <a:solidFill>
                             <a:schemeClr val="bg1"/>
                           </a:solidFill>
@@ -4857,7 +4903,7 @@
                         <a:t>7</a:t>
                       </a:r>
                       <a:r>
-                        <a:rPr lang="ko-KR" altLang="en-US" sz="2600" b="1">
+                        <a:rPr lang="ko-KR" altLang="en-US" sz="2500" b="1">
                           <a:solidFill>
                             <a:schemeClr val="bg1"/>
                           </a:solidFill>
@@ -4866,7 +4912,7 @@
                         </a:rPr>
                         <a:t>주차</a:t>
                       </a:r>
-                      <a:endParaRPr lang="ko-KR" altLang="en-US" sz="2600" b="1">
+                      <a:endParaRPr lang="ko-KR" altLang="en-US" sz="2500" b="1">
                         <a:solidFill>
                           <a:schemeClr val="bg1"/>
                         </a:solidFill>
@@ -4880,13 +4926,12 @@
                 <a:tc>
                   <a:txBody>
                     <a:bodyPr vert="horz" lIns="91440" tIns="45720" rIns="91440" bIns="45720" anchor="t" anchorCtr="0"/>
-                    <a:lstStyle/>
                     <a:p>
                       <a:pPr lvl="0" algn="ctr" latinLnBrk="1">
                         <a:defRPr/>
                       </a:pPr>
                       <a:r>
-                        <a:rPr lang="ko-KR" altLang="en-US" sz="2600" b="1">
+                        <a:rPr lang="ko-KR" altLang="en-US" sz="2500" b="1">
                           <a:solidFill>
                             <a:schemeClr val="bg1"/>
                           </a:solidFill>
@@ -4896,7 +4941,7 @@
                         <a:t>스테이지 </a:t>
                       </a:r>
                       <a:r>
-                        <a:rPr lang="en-US" altLang="ko-KR" sz="2600" b="1">
+                        <a:rPr lang="en-US" altLang="ko-KR" sz="2500" b="1">
                           <a:solidFill>
                             <a:schemeClr val="bg1"/>
                           </a:solidFill>
@@ -4906,7 +4951,7 @@
                         <a:t>3</a:t>
                       </a:r>
                       <a:r>
-                        <a:rPr lang="ko-KR" altLang="en-US" sz="2600" b="1">
+                        <a:rPr lang="ko-KR" altLang="en-US" sz="2500" b="1">
                           <a:solidFill>
                             <a:schemeClr val="bg1"/>
                           </a:solidFill>
@@ -4915,7 +4960,7 @@
                         </a:rPr>
                         <a:t> 개발</a:t>
                       </a:r>
-                      <a:endParaRPr lang="ko-KR" altLang="en-US" sz="2600" b="1">
+                      <a:endParaRPr lang="ko-KR" altLang="en-US" sz="2500" b="1">
                         <a:solidFill>
                           <a:schemeClr val="bg1"/>
                         </a:solidFill>
@@ -4929,12 +4974,11 @@
                 <a:tc rowSpan="2">
                   <a:txBody>
                     <a:bodyPr vert="horz" lIns="91440" tIns="45720" rIns="91440" bIns="45720" anchor="t" anchorCtr="0"/>
-                    <a:lstStyle/>
                     <a:p>
                       <a:pPr lvl="0" algn="ctr" latinLnBrk="1">
                         <a:defRPr/>
                       </a:pPr>
-                      <a:endParaRPr lang="ko-KR" altLang="en-US" sz="2600" b="1">
+                      <a:endParaRPr lang="ko-KR" altLang="en-US" sz="2500" b="1">
                         <a:solidFill>
                           <a:schemeClr val="bg1"/>
                         </a:solidFill>
@@ -4964,12 +5008,11 @@
                 <a:tc>
                   <a:txBody>
                     <a:bodyPr vert="horz" lIns="91440" tIns="45720" rIns="91440" bIns="45720" anchor="t" anchorCtr="0"/>
-                    <a:lstStyle/>
                     <a:p>
                       <a:pPr lvl="0" algn="ctr" latinLnBrk="1">
                         <a:defRPr/>
                       </a:pPr>
-                      <a:endParaRPr lang="ko-KR" altLang="en-US" sz="2600" b="1">
+                      <a:endParaRPr lang="ko-KR" altLang="en-US" sz="2500" b="1">
                         <a:solidFill>
                           <a:schemeClr val="bg1"/>
                         </a:solidFill>
@@ -4999,13 +5042,12 @@
                 <a:tc rowSpan="2">
                   <a:txBody>
                     <a:bodyPr vert="horz" lIns="91440" tIns="45720" rIns="91440" bIns="45720" anchor="t" anchorCtr="0"/>
-                    <a:lstStyle/>
                     <a:p>
                       <a:pPr lvl="0" algn="ctr" latinLnBrk="1">
                         <a:defRPr/>
                       </a:pPr>
                       <a:r>
-                        <a:rPr lang="en-US" altLang="ko-KR" sz="2600" b="1">
+                        <a:rPr lang="en-US" altLang="ko-KR" sz="2500" b="1">
                           <a:solidFill>
                             <a:schemeClr val="bg1"/>
                           </a:solidFill>
@@ -5015,7 +5057,7 @@
                         <a:t>8</a:t>
                       </a:r>
                       <a:r>
-                        <a:rPr lang="ko-KR" altLang="en-US" sz="2600" b="1">
+                        <a:rPr lang="ko-KR" altLang="en-US" sz="2500" b="1">
                           <a:solidFill>
                             <a:schemeClr val="bg1"/>
                           </a:solidFill>
@@ -5024,7 +5066,7 @@
                         </a:rPr>
                         <a:t>주차</a:t>
                       </a:r>
-                      <a:endParaRPr lang="ko-KR" altLang="en-US" sz="2600" b="1">
+                      <a:endParaRPr lang="ko-KR" altLang="en-US" sz="2500" b="1">
                         <a:solidFill>
                           <a:schemeClr val="bg1"/>
                         </a:solidFill>
@@ -5040,21 +5082,18 @@
                       </a:solidFill>
                       <a:prstDash val="solid"/>
                       <a:round/>
-                      <a:headEnd w="med" len="med"/>
-                      <a:tailEnd w="med" len="med"/>
                     </a:lnB>
                   </a:tcPr>
                 </a:tc>
                 <a:tc>
                   <a:txBody>
                     <a:bodyPr vert="horz" lIns="91440" tIns="45720" rIns="91440" bIns="45720" anchor="t" anchorCtr="0"/>
-                    <a:lstStyle/>
                     <a:p>
                       <a:pPr lvl="0" algn="ctr" latinLnBrk="1">
                         <a:defRPr/>
                       </a:pPr>
                       <a:r>
-                        <a:rPr lang="en-US" altLang="ko-KR" sz="2600" b="1">
+                        <a:rPr lang="en-US" altLang="ko-KR" sz="2500" b="1">
                           <a:solidFill>
                             <a:schemeClr val="bg1"/>
                           </a:solidFill>
@@ -5064,7 +5103,7 @@
                         <a:t>UI/</a:t>
                       </a:r>
                       <a:r>
-                        <a:rPr lang="ko-KR" altLang="en-US" sz="2600" b="1">
+                        <a:rPr lang="ko-KR" altLang="en-US" sz="2500" b="1">
                           <a:solidFill>
                             <a:schemeClr val="bg1"/>
                           </a:solidFill>
@@ -5073,7 +5112,7 @@
                         </a:rPr>
                         <a:t>디버깅</a:t>
                       </a:r>
-                      <a:endParaRPr lang="ko-KR" altLang="en-US" sz="2600" b="1">
+                      <a:endParaRPr lang="ko-KR" altLang="en-US" sz="2500" b="1">
                         <a:solidFill>
                           <a:schemeClr val="bg1"/>
                         </a:solidFill>
@@ -5089,20 +5128,17 @@
                       </a:solidFill>
                       <a:prstDash val="solid"/>
                       <a:round/>
-                      <a:headEnd w="med" len="med"/>
-                      <a:tailEnd w="med" len="med"/>
                     </a:lnB>
                   </a:tcPr>
                 </a:tc>
                 <a:tc rowSpan="2">
                   <a:txBody>
                     <a:bodyPr vert="horz" lIns="91440" tIns="45720" rIns="91440" bIns="45720" anchor="t" anchorCtr="0"/>
-                    <a:lstStyle/>
                     <a:p>
                       <a:pPr lvl="0" algn="ctr" latinLnBrk="1">
                         <a:defRPr/>
                       </a:pPr>
-                      <a:endParaRPr lang="ko-KR" altLang="en-US" sz="2600" b="1">
+                      <a:endParaRPr lang="ko-KR" altLang="en-US" sz="2500" b="1">
                         <a:solidFill>
                           <a:schemeClr val="bg1"/>
                         </a:solidFill>
@@ -5118,8 +5154,6 @@
                       </a:solidFill>
                       <a:prstDash val="solid"/>
                       <a:round/>
-                      <a:headEnd w="med" len="med"/>
-                      <a:tailEnd w="med" len="med"/>
                     </a:lnB>
                   </a:tcPr>
                 </a:tc>
@@ -5142,12 +5176,11 @@
                 <a:tc>
                   <a:txBody>
                     <a:bodyPr vert="horz" lIns="91440" tIns="45720" rIns="91440" bIns="45720" anchor="t" anchorCtr="0"/>
-                    <a:lstStyle/>
                     <a:p>
                       <a:pPr lvl="0" algn="ctr" latinLnBrk="1">
                         <a:defRPr/>
                       </a:pPr>
-                      <a:endParaRPr lang="ko-KR" altLang="en-US" sz="2600" b="1">
+                      <a:endParaRPr lang="ko-KR" altLang="en-US" sz="2500" b="1">
                         <a:solidFill>
                           <a:schemeClr val="bg1"/>
                         </a:solidFill>
@@ -5163,8 +5196,6 @@
                       </a:solidFill>
                       <a:prstDash val="solid"/>
                       <a:round/>
-                      <a:headEnd w="med" len="med"/>
-                      <a:tailEnd w="med" len="med"/>
                     </a:lnT>
                     <a:lnB w="12700" cap="flat" cmpd="sng" algn="ctr">
                       <a:solidFill>
@@ -5172,8 +5203,6 @@
                       </a:solidFill>
                       <a:prstDash val="solid"/>
                       <a:round/>
-                      <a:headEnd w="med" len="med"/>
-                      <a:tailEnd w="med" len="med"/>
                     </a:lnB>
                   </a:tcPr>
                 </a:tc>
@@ -5196,13 +5225,12 @@
                 <a:tc rowSpan="2">
                   <a:txBody>
                     <a:bodyPr vert="horz" lIns="91440" tIns="45720" rIns="91440" bIns="45720" anchor="t" anchorCtr="0"/>
-                    <a:lstStyle/>
                     <a:p>
                       <a:pPr lvl="0" algn="ctr" latinLnBrk="1">
                         <a:defRPr/>
                       </a:pPr>
                       <a:r>
-                        <a:rPr lang="en-US" altLang="ko-KR" sz="2600" b="1">
+                        <a:rPr lang="en-US" altLang="ko-KR" sz="2500" b="1">
                           <a:solidFill>
                             <a:schemeClr val="bg1"/>
                           </a:solidFill>
@@ -5212,7 +5240,7 @@
                         <a:t>9</a:t>
                       </a:r>
                       <a:r>
-                        <a:rPr lang="ko-KR" altLang="en-US" sz="2600" b="1">
+                        <a:rPr lang="ko-KR" altLang="en-US" sz="2500" b="1">
                           <a:solidFill>
                             <a:schemeClr val="bg1"/>
                           </a:solidFill>
@@ -5221,7 +5249,7 @@
                         </a:rPr>
                         <a:t>주차</a:t>
                       </a:r>
-                      <a:endParaRPr lang="ko-KR" altLang="en-US" sz="2600" b="1">
+                      <a:endParaRPr lang="ko-KR" altLang="en-US" sz="2500" b="1">
                         <a:solidFill>
                           <a:schemeClr val="bg1"/>
                         </a:solidFill>
@@ -5237,8 +5265,6 @@
                       </a:solidFill>
                       <a:prstDash val="solid"/>
                       <a:round/>
-                      <a:headEnd w="med" len="med"/>
-                      <a:tailEnd w="med" len="med"/>
                     </a:lnT>
                     <a:lnB w="12700" cap="flat" cmpd="sng" algn="ctr">
                       <a:solidFill>
@@ -5246,21 +5272,18 @@
                       </a:solidFill>
                       <a:prstDash val="solid"/>
                       <a:round/>
-                      <a:headEnd w="med" len="med"/>
-                      <a:tailEnd w="med" len="med"/>
                     </a:lnB>
                   </a:tcPr>
                 </a:tc>
                 <a:tc>
                   <a:txBody>
                     <a:bodyPr vert="horz" lIns="91440" tIns="45720" rIns="91440" bIns="45720" anchor="t" anchorCtr="0"/>
-                    <a:lstStyle/>
                     <a:p>
                       <a:pPr lvl="0" algn="ctr" latinLnBrk="1">
                         <a:defRPr/>
                       </a:pPr>
                       <a:r>
-                        <a:rPr lang="ko-KR" altLang="en-US" sz="2600" b="1">
+                        <a:rPr lang="ko-KR" altLang="en-US" sz="2500" b="1">
                           <a:solidFill>
                             <a:schemeClr val="bg1"/>
                           </a:solidFill>
@@ -5269,7 +5292,7 @@
                         </a:rPr>
                         <a:t>최종 검사</a:t>
                       </a:r>
-                      <a:endParaRPr lang="ko-KR" altLang="en-US" sz="2600" b="1">
+                      <a:endParaRPr lang="ko-KR" altLang="en-US" sz="2500" b="1">
                         <a:solidFill>
                           <a:schemeClr val="bg1"/>
                         </a:solidFill>
@@ -5285,8 +5308,6 @@
                       </a:solidFill>
                       <a:prstDash val="solid"/>
                       <a:round/>
-                      <a:headEnd w="med" len="med"/>
-                      <a:tailEnd w="med" len="med"/>
                     </a:lnT>
                     <a:lnB w="12700" cap="flat" cmpd="sng" algn="ctr">
                       <a:solidFill>
@@ -5294,20 +5315,17 @@
                       </a:solidFill>
                       <a:prstDash val="solid"/>
                       <a:round/>
-                      <a:headEnd w="med" len="med"/>
-                      <a:tailEnd w="med" len="med"/>
                     </a:lnB>
                   </a:tcPr>
                 </a:tc>
                 <a:tc rowSpan="2">
                   <a:txBody>
                     <a:bodyPr vert="horz" lIns="91440" tIns="45720" rIns="91440" bIns="45720" anchor="t" anchorCtr="0"/>
-                    <a:lstStyle/>
                     <a:p>
                       <a:pPr lvl="0" algn="ctr" latinLnBrk="1">
                         <a:defRPr/>
                       </a:pPr>
-                      <a:endParaRPr lang="ko-KR" altLang="en-US" sz="2600" b="1">
+                      <a:endParaRPr lang="ko-KR" altLang="en-US" sz="2500" b="1">
                         <a:solidFill>
                           <a:schemeClr val="bg1"/>
                         </a:solidFill>
@@ -5323,8 +5341,6 @@
                       </a:solidFill>
                       <a:prstDash val="solid"/>
                       <a:round/>
-                      <a:headEnd w="med" len="med"/>
-                      <a:tailEnd w="med" len="med"/>
                     </a:lnT>
                     <a:lnB w="12700" cap="flat" cmpd="sng" algn="ctr">
                       <a:solidFill>
@@ -5332,8 +5348,6 @@
                       </a:solidFill>
                       <a:prstDash val="solid"/>
                       <a:round/>
-                      <a:headEnd w="med" len="med"/>
-                      <a:tailEnd w="med" len="med"/>
                     </a:lnB>
                   </a:tcPr>
                 </a:tc>
@@ -5356,12 +5370,11 @@
                 <a:tc>
                   <a:txBody>
                     <a:bodyPr vert="horz" lIns="91440" tIns="45720" rIns="91440" bIns="45720" anchor="t" anchorCtr="0"/>
-                    <a:lstStyle/>
                     <a:p>
                       <a:pPr lvl="0" algn="ctr" latinLnBrk="1">
                         <a:defRPr/>
                       </a:pPr>
-                      <a:endParaRPr lang="ko-KR" altLang="en-US" sz="2600" b="1">
+                      <a:endParaRPr lang="ko-KR" altLang="en-US" sz="2500" b="1">
                         <a:solidFill>
                           <a:schemeClr val="bg1"/>
                         </a:solidFill>
@@ -5377,8 +5390,6 @@
                       </a:solidFill>
                       <a:prstDash val="solid"/>
                       <a:round/>
-                      <a:headEnd w="med" len="med"/>
-                      <a:tailEnd w="med" len="med"/>
                     </a:lnT>
                     <a:lnB w="12700" cap="flat" cmpd="sng" algn="ctr">
                       <a:solidFill>
@@ -5386,8 +5397,6 @@
                       </a:solidFill>
                       <a:prstDash val="solid"/>
                       <a:round/>
-                      <a:headEnd w="med" len="med"/>
-                      <a:tailEnd w="med" len="med"/>
                     </a:lnB>
                   </a:tcPr>
                 </a:tc>
@@ -5411,15 +5420,18 @@
         </a:graphic>
       </p:graphicFrame>
     </p:spTree>
-    <p:extLst>
-      <p:ext uri="{BB962C8B-B14F-4D97-AF65-F5344CB8AC3E}">
-        <p14:creationId xmlns:p14="http://schemas.microsoft.com/office/powerpoint/2010/main" val="2998652775"/>
-      </p:ext>
-    </p:extLst>
   </p:cSld>
   <p:clrMapOvr>
     <a:masterClrMapping/>
   </p:clrMapOvr>
+  <mc:AlternateContent xmlns:mc="http://schemas.openxmlformats.org/markup-compatibility/2006">
+    <mc:Choice xmlns:p14="http://schemas.microsoft.com/office/powerpoint/2010/main" Requires="p14">
+      <p:transition xmlns:mc="http://schemas.openxmlformats.org/markup-compatibility/2006" xmlns:p14="http://schemas.microsoft.com/office/powerpoint/2010/main" mc:Ignorable="p14" p14:dur="500"/>
+    </mc:Choice>
+    <mc:Fallback>
+      <p:transition/>
+    </mc:Fallback>
+  </mc:AlternateContent>
 </p:sld>
 </file>
 
@@ -5449,20 +5461,22 @@
       </p:grpSpPr>
       <p:grpSp>
         <p:nvGrpSpPr>
-          <p:cNvPr name="Group 2" id="2"/>
+          <p:cNvPr id="2" name="Group 2"/>
           <p:cNvGrpSpPr/>
           <p:nvPr/>
         </p:nvGrpSpPr>
         <p:grpSpPr>
-          <a:xfrm>
+          <a:xfrm rot="0">
             <a:off x="0" y="0"/>
-            <a:ext cx="2147483647" cy="2147483647"/>
+            <a:ext cx="2147483648" cy="2147483648"/>
+            <a:chOff x="0" y="0"/>
+            <a:chExt cx="914400" cy="914400"/>
           </a:xfrm>
         </p:grpSpPr>
       </p:grpSp>
       <p:pic>
         <p:nvPicPr>
-          <p:cNvPr id="3" name="Picture 3"/>
+          <p:cNvPr id="4" name="그림 1"/>
           <p:cNvPicPr>
             <a:picLocks noChangeAspect="1"/>
           </p:cNvPicPr>
@@ -5476,8 +5490,136 @@
         </p:blipFill>
         <p:spPr>
           <a:xfrm>
-            <a:off x="0" y="0"/>
-            <a:ext cx="18300700" cy="10325100"/>
+            <a:off x="0" y="1"/>
+            <a:ext cx="18288000" cy="10286998"/>
+          </a:xfrm>
+          <a:prstGeom prst="rect">
+            <a:avLst/>
+          </a:prstGeom>
+        </p:spPr>
+      </p:pic>
+      <p:sp>
+        <p:nvSpPr>
+          <p:cNvPr id="5" name="가로 글상자 3"/>
+          <p:cNvSpPr txBox="1"/>
+          <p:nvPr/>
+        </p:nvSpPr>
+        <p:spPr>
+          <a:xfrm>
+            <a:off x="3962399" y="329565"/>
+            <a:ext cx="10363200" cy="1003935"/>
+          </a:xfrm>
+          <a:prstGeom prst="rect">
+            <a:avLst/>
+          </a:prstGeom>
+        </p:spPr>
+        <p:txBody>
+          <a:bodyPr wrap="square">
+            <a:spAutoFit/>
+          </a:bodyPr>
+          <a:lstStyle/>
+          <a:p>
+            <a:pPr lvl="0" algn="ctr">
+              <a:defRPr/>
+            </a:pPr>
+            <a:r>
+              <a:rPr lang="en-US" altLang="ko-KR" sz="6000" b="1">
+                <a:solidFill>
+                  <a:schemeClr val="lt1"/>
+                </a:solidFill>
+              </a:rPr>
+              <a:t>Github</a:t>
+            </a:r>
+            <a:r>
+              <a:rPr lang="ko-KR" altLang="en-US" sz="6000" b="1">
+                <a:solidFill>
+                  <a:schemeClr val="lt1"/>
+                </a:solidFill>
+              </a:rPr>
+              <a:t> </a:t>
+            </a:r>
+            <a:r>
+              <a:rPr lang="en-US" altLang="ko-KR" sz="6000" b="1">
+                <a:solidFill>
+                  <a:schemeClr val="lt1"/>
+                </a:solidFill>
+              </a:rPr>
+              <a:t>commits</a:t>
+            </a:r>
+            <a:endParaRPr lang="en-US" altLang="ko-KR" sz="6000" b="1">
+              <a:solidFill>
+                <a:schemeClr val="lt1"/>
+              </a:solidFill>
+            </a:endParaRPr>
+          </a:p>
+        </p:txBody>
+      </p:sp>
+      <p:sp>
+        <p:nvSpPr>
+          <p:cNvPr id="6" name="직사각형 2"/>
+          <p:cNvSpPr/>
+          <p:nvPr/>
+        </p:nvSpPr>
+        <p:spPr>
+          <a:xfrm>
+            <a:off x="2667000" y="3238500"/>
+            <a:ext cx="12268200" cy="4267200"/>
+          </a:xfrm>
+          <a:prstGeom prst="rect">
+            <a:avLst/>
+          </a:prstGeom>
+          <a:solidFill>
+            <a:srgbClr val="1a191d"/>
+          </a:solidFill>
+          <a:ln>
+            <a:noFill/>
+          </a:ln>
+        </p:spPr>
+        <p:style>
+          <a:lnRef idx="2">
+            <a:schemeClr val="accent1">
+              <a:shade val="20000"/>
+            </a:schemeClr>
+          </a:lnRef>
+          <a:fillRef idx="1">
+            <a:schemeClr val="accent1"/>
+          </a:fillRef>
+          <a:effectRef idx="0">
+            <a:schemeClr val="accent1"/>
+          </a:effectRef>
+          <a:fontRef idx="minor">
+            <a:schemeClr val="lt1"/>
+          </a:fontRef>
+        </p:style>
+        <p:txBody>
+          <a:bodyPr anchor="ctr"/>
+          <a:lstStyle/>
+          <a:p>
+            <a:pPr lvl="0" algn="ctr">
+              <a:defRPr/>
+            </a:pPr>
+            <a:endParaRPr lang="ko-KR" altLang="en-US"/>
+          </a:p>
+        </p:txBody>
+      </p:sp>
+      <p:pic>
+        <p:nvPicPr>
+          <p:cNvPr id="8" name=""/>
+          <p:cNvPicPr>
+            <a:picLocks noChangeAspect="1"/>
+          </p:cNvPicPr>
+          <p:nvPr/>
+        </p:nvPicPr>
+        <p:blipFill rotWithShape="1">
+          <a:blip r:embed="rId3"/>
+          <a:stretch>
+            <a:fillRect/>
+          </a:stretch>
+        </p:blipFill>
+        <p:spPr>
+          <a:xfrm>
+            <a:off x="588875" y="1980247"/>
+            <a:ext cx="11984123" cy="6820852"/>
           </a:xfrm>
           <a:prstGeom prst="rect">
             <a:avLst/>
@@ -5489,11 +5631,19 @@
   <p:clrMapOvr>
     <a:masterClrMapping/>
   </p:clrMapOvr>
+  <mc:AlternateContent xmlns:mc="http://schemas.openxmlformats.org/markup-compatibility/2006">
+    <mc:Choice xmlns:p14="http://schemas.microsoft.com/office/powerpoint/2010/main" Requires="p14">
+      <p:transition xmlns:mc="http://schemas.openxmlformats.org/markup-compatibility/2006" xmlns:p14="http://schemas.microsoft.com/office/powerpoint/2010/main" mc:Ignorable="p14" p14:dur="500"/>
+    </mc:Choice>
+    <mc:Fallback>
+      <p:transition/>
+    </mc:Fallback>
+  </mc:AlternateContent>
 </p:sld>
 </file>
 
 <file path=ppt/theme/theme1.xml><?xml version="1.0" encoding="utf-8"?>
-<a:theme xmlns:r="http://schemas.openxmlformats.org/officeDocument/2006/relationships" xmlns:c="http://schemas.openxmlformats.org/drawingml/2006/chart" xmlns:dgm="http://schemas.openxmlformats.org/drawingml/2006/diagram" xmlns:dsp="http://schemas.microsoft.com/office/drawing/2008/diagram" xmlns:a="http://schemas.openxmlformats.org/drawingml/2006/main" xmlns:pic="http://schemas.openxmlformats.org/drawingml/2006/picture" xmlns:wp="http://schemas.openxmlformats.org/drawingml/2006/wordprocessingDrawing" xmlns:xdr="http://schemas.openxmlformats.org/drawingml/2006/spreadsheetDrawing" xmlns:lc="http://schemas.openxmlformats.org/drawingml/2006/lockedCanvas" xmlns:p="http://schemas.openxmlformats.org/presentationml/2006/main" name="Office Theme">
+<a:theme xmlns:r="http://schemas.openxmlformats.org/officeDocument/2006/relationships" xmlns:c="http://schemas.openxmlformats.org/drawingml/2006/chart" xmlns:dgm="http://schemas.openxmlformats.org/drawingml/2006/diagram" xmlns:dsp="http://schemas.microsoft.com/office/drawing/2008/diagram" xmlns:a="http://schemas.openxmlformats.org/drawingml/2006/main" xmlns:pic="http://schemas.openxmlformats.org/drawingml/2006/picture" xmlns:wp="http://schemas.openxmlformats.org/drawingml/2006/wordprocessingDrawing" xmlns:xdr="http://schemas.openxmlformats.org/drawingml/2006/spreadsheetDrawing" xmlns:p="http://schemas.openxmlformats.org/presentationml/2006/main" name="Office Theme">
   <a:themeElements>
     <a:clrScheme name="Office">
       <a:dk1>
@@ -5774,7 +5924,7 @@
 </file>
 
 <file path=ppt/theme/theme2.xml><?xml version="1.0" encoding="utf-8"?>
-<a:theme xmlns:r="http://schemas.openxmlformats.org/officeDocument/2006/relationships" xmlns:c="http://schemas.openxmlformats.org/drawingml/2006/chart" xmlns:dgm="http://schemas.openxmlformats.org/drawingml/2006/diagram" xmlns:dsp="http://schemas.microsoft.com/office/drawing/2008/diagram" xmlns:a="http://schemas.openxmlformats.org/drawingml/2006/main" xmlns:pic="http://schemas.openxmlformats.org/drawingml/2006/picture" xmlns:wp="http://schemas.openxmlformats.org/drawingml/2006/wordprocessingDrawing" xmlns:xdr="http://schemas.openxmlformats.org/drawingml/2006/spreadsheetDrawing" xmlns:lc="http://schemas.openxmlformats.org/drawingml/2006/lockedCanvas" xmlns:p="http://schemas.openxmlformats.org/presentationml/2006/main" name="한컴오피스">
+<a:theme xmlns:r="http://schemas.openxmlformats.org/officeDocument/2006/relationships" xmlns:c="http://schemas.openxmlformats.org/drawingml/2006/chart" xmlns:dgm="http://schemas.openxmlformats.org/drawingml/2006/diagram" xmlns:dsp="http://schemas.microsoft.com/office/drawing/2008/diagram" xmlns:a="http://schemas.openxmlformats.org/drawingml/2006/main" xmlns:pic="http://schemas.openxmlformats.org/drawingml/2006/picture" xmlns:wp="http://schemas.openxmlformats.org/drawingml/2006/wordprocessingDrawing" xmlns:xdr="http://schemas.openxmlformats.org/drawingml/2006/spreadsheetDrawing" xmlns:p="http://schemas.openxmlformats.org/presentationml/2006/main" name="한컴오피스">
   <a:themeElements>
     <a:clrScheme name="한컴오피스">
       <a:dk1>
